--- a/assets/ppts/M2.1.5_Socket_Programming_IO_Multiplexing.pptx
+++ b/assets/ppts/M2.1.5_Socket_Programming_IO_Multiplexing.pptx
@@ -8,6 +8,7 @@
     <p:sldId id="256" r:id="rId7"/>
     <p:sldId id="257" r:id="rId8"/>
     <p:sldId id="258" r:id="rId9"/>
+    <p:sldId id="259" r:id="rId10"/>
   </p:sldIdLst>
   <p:sldSz cx="12191695" cy="6858000" type="screen4x3"/>
   <p:notesSz cx="6858000" cy="9144000"/>
@@ -3141,8 +3142,8 @@
         </p:nvSpPr>
         <p:spPr>
           <a:xfrm>
-            <a:off x="822960" y="1188720"/>
-            <a:ext cx="164592" cy="4480560"/>
+            <a:off x="0" y="0"/>
+            <a:ext cx="12191695" cy="137160"/>
           </a:xfrm>
           <a:prstGeom prst="rect">
             <a:avLst/>
@@ -3178,14 +3179,57 @@
       </p:sp>
       <p:sp>
         <p:nvSpPr>
-          <p:cNvPr id="4" name="TextBox 3"/>
+          <p:cNvPr id="4" name="Rectangle 3"/>
+          <p:cNvSpPr/>
+          <p:nvPr/>
+        </p:nvSpPr>
+        <p:spPr>
+          <a:xfrm>
+            <a:off x="822960" y="1097280"/>
+            <a:ext cx="164592" cy="4663440"/>
+          </a:xfrm>
+          <a:prstGeom prst="rect">
+            <a:avLst/>
+          </a:prstGeom>
+          <a:solidFill>
+            <a:srgbClr val="D97706"/>
+          </a:solidFill>
+          <a:ln>
+            <a:noFill/>
+          </a:ln>
+        </p:spPr>
+        <p:style>
+          <a:lnRef idx="1">
+            <a:schemeClr val="accent1"/>
+          </a:lnRef>
+          <a:fillRef idx="3">
+            <a:schemeClr val="accent1"/>
+          </a:fillRef>
+          <a:effectRef idx="2">
+            <a:schemeClr val="accent1"/>
+          </a:effectRef>
+          <a:fontRef idx="minor">
+            <a:schemeClr val="lt1"/>
+          </a:fontRef>
+        </p:style>
+        <p:txBody>
+          <a:bodyPr rtlCol="0" anchor="ctr"/>
+          <a:lstStyle/>
+          <a:p>
+            <a:pPr algn="ctr"/>
+          </a:p>
+        </p:txBody>
+      </p:sp>
+      <p:sp>
+        <p:nvSpPr>
+          <p:cNvPr id="5" name="TextBox 4"/>
           <p:cNvSpPr txBox="1"/>
           <p:nvPr/>
         </p:nvSpPr>
         <p:spPr>
           <a:xfrm>
-            <a:off x="1280160" y="1097280"/>
-            <a:ext cx="10058400" cy="4663440"/>
+            <a:off x="1234440" y="1005840"/>
+            <a:ext cx="10241280" cy="4846320"/>
           </a:xfrm>
           <a:prstGeom prst="rect">
             <a:avLst/>
@@ -3200,70 +3244,165 @@
           <a:p>
             <a:pPr>
               <a:spcAft>
+                <a:spcPts val="1000"/>
+              </a:spcAft>
+              <a:defRPr b="1" sz="1300">
+                <a:solidFill>
+                  <a:srgbClr val="D97706"/>
+                </a:solidFill>
+              </a:defRPr>
+            </a:pPr>
+            <a:r>
+              <a:t>PCCST501 Computer Networks | KTU 2024 Scheme • MODULE 2 • M2.1.5</a:t>
+            </a:r>
+          </a:p>
+          <a:p>
+            <a:pPr>
+              <a:spcAft>
                 <a:spcPts val="1200"/>
               </a:spcAft>
-              <a:defRPr b="1" sz="1300">
-                <a:solidFill>
-                  <a:srgbClr val="D97706"/>
+              <a:defRPr b="1" sz="3000">
+                <a:solidFill>
+                  <a:srgbClr val="F8FAFC"/>
                 </a:solidFill>
               </a:defRPr>
             </a:pPr>
             <a:r>
-              <a:t>PCCST501 Computer Networks | KTU 2024 Scheme • MODULE 2 • M2.1.5</a:t>
+              <a:t>Berkeley Socket API &amp; I/O Multiplexing</a:t>
             </a:r>
           </a:p>
           <a:p>
             <a:pPr>
               <a:spcAft>
-                <a:spcPts val="1400"/>
+                <a:spcPts val="2400"/>
               </a:spcAft>
-              <a:defRPr b="1" sz="3200">
-                <a:solidFill>
-                  <a:srgbClr val="F8FAFC"/>
+              <a:defRPr sz="1600">
+                <a:solidFill>
+                  <a:srgbClr val="94A3B8"/>
                 </a:solidFill>
               </a:defRPr>
             </a:pPr>
             <a:r>
-              <a:t>Berkeley Socket API &amp; I/O Multiplexing</a:t>
+              <a:t>Socket System Calls Lifecycle (TCP &amp; UDP), I/O Multiplexing with select() and poll(), fd_set Macros, Non-Blocking Sockets</a:t>
             </a:r>
           </a:p>
           <a:p>
             <a:pPr>
               <a:spcAft>
-                <a:spcPts val="2800"/>
+                <a:spcPts val="300"/>
               </a:spcAft>
-              <a:defRPr sz="1700">
+              <a:defRPr b="1" sz="1350">
+                <a:solidFill>
+                  <a:srgbClr val="E2E8F0"/>
+                </a:solidFill>
+              </a:defRPr>
+            </a:pPr>
+            <a:r>
+              <a:t>Prepared by: Prof. Anju Markose | Assistant Professor, Dept. of CSE | VJCET</a:t>
+            </a:r>
+          </a:p>
+          <a:p>
+            <a:pPr>
+              <a:defRPr sz="1150">
                 <a:solidFill>
                   <a:srgbClr val="94A3B8"/>
                 </a:solidFill>
               </a:defRPr>
             </a:pPr>
             <a:r>
-              <a:t>Socket System Call Lifecycle, TCP/UDP Client-Server Code Architecture, I/O Multiplexing with select() and poll()</a:t>
-            </a:r>
-          </a:p>
+              <a:t>Viswajyothi College of Engineering and Technology (VJCET), Vazhakulam • KTU S5 CSE</a:t>
+            </a:r>
+          </a:p>
+        </p:txBody>
+      </p:sp>
+      <p:sp>
+        <p:nvSpPr>
+          <p:cNvPr id="6" name="Rounded Rectangle 5"/>
+          <p:cNvSpPr/>
+          <p:nvPr/>
+        </p:nvSpPr>
+        <p:spPr>
+          <a:xfrm>
+            <a:off x="8412480" y="5120640"/>
+            <a:ext cx="3017520" cy="822960"/>
+          </a:xfrm>
+          <a:prstGeom prst="roundRect">
+            <a:avLst/>
+          </a:prstGeom>
+          <a:solidFill>
+            <a:srgbClr val="1E293B"/>
+          </a:solidFill>
+          <a:ln w="12700">
+            <a:solidFill>
+              <a:srgbClr val="0E7490"/>
+            </a:solidFill>
+          </a:ln>
+        </p:spPr>
+        <p:style>
+          <a:lnRef idx="1">
+            <a:schemeClr val="accent1"/>
+          </a:lnRef>
+          <a:fillRef idx="3">
+            <a:schemeClr val="accent1"/>
+          </a:fillRef>
+          <a:effectRef idx="2">
+            <a:schemeClr val="accent1"/>
+          </a:effectRef>
+          <a:fontRef idx="minor">
+            <a:schemeClr val="lt1"/>
+          </a:fontRef>
+        </p:style>
+        <p:txBody>
+          <a:bodyPr rtlCol="0" anchor="ctr"/>
+          <a:lstStyle/>
+          <a:p>
+            <a:pPr algn="ctr"/>
+          </a:p>
+        </p:txBody>
+      </p:sp>
+      <p:sp>
+        <p:nvSpPr>
+          <p:cNvPr id="7" name="TextBox 6"/>
+          <p:cNvSpPr txBox="1"/>
+          <p:nvPr/>
+        </p:nvSpPr>
+        <p:spPr>
+          <a:xfrm>
+            <a:off x="8503920" y="5166360"/>
+            <a:ext cx="2834640" cy="731520"/>
+          </a:xfrm>
+          <a:prstGeom prst="rect">
+            <a:avLst/>
+          </a:prstGeom>
+          <a:noFill/>
+        </p:spPr>
+        <p:txBody>
+          <a:bodyPr wrap="none">
+            <a:spAutoFit/>
+          </a:bodyPr>
+          <a:lstStyle/>
           <a:p>
             <a:pPr>
-              <a:defRPr b="1" sz="1300">
-                <a:solidFill>
-                  <a:srgbClr val="E2E8F0"/>
+              <a:defRPr b="1" sz="1050">
+                <a:solidFill>
+                  <a:srgbClr val="D97706"/>
                 </a:solidFill>
               </a:defRPr>
             </a:pPr>
             <a:r>
-              <a:t>Prepared by: Prof. Anju Markose | Assistant Professor, Dept. of CSE | VJCET</a:t>
+              <a:t>KTU B.Tech Curriculum</a:t>
             </a:r>
           </a:p>
           <a:p>
             <a:pPr>
-              <a:defRPr sz="1100">
-                <a:solidFill>
-                  <a:srgbClr val="94A3B8"/>
+              <a:defRPr sz="950">
+                <a:solidFill>
+                  <a:srgbClr val="F8FAFC"/>
                 </a:solidFill>
               </a:defRPr>
             </a:pPr>
             <a:r>
-              <a:t>Viswajyothi College of Engineering and Technology (VJCET), Vazhakulam</a:t>
+              <a:t>Official Classroom Slide Deck</a:t>
             </a:r>
           </a:p>
         </p:txBody>
@@ -3395,14 +3534,14 @@
           <a:lstStyle/>
           <a:p>
             <a:pPr>
-              <a:defRPr b="1" sz="2300">
+              <a:defRPr b="1" sz="2200">
                 <a:solidFill>
                   <a:srgbClr val="F8FAFC"/>
                 </a:solidFill>
               </a:defRPr>
             </a:pPr>
             <a:r>
-              <a:t>2.1.5.1 TCP vs UDP Socket API Lifecycle</a:t>
+              <a:t>2.1.5.1 Berkeley Socket API System Call Lifecycle</a:t>
             </a:r>
           </a:p>
         </p:txBody>
@@ -3444,20 +3583,163 @@
       </p:sp>
       <p:sp>
         <p:nvSpPr>
-          <p:cNvPr id="6" name="Rounded Rectangle 5"/>
+          <p:cNvPr id="6" name="TextBox 5"/>
+          <p:cNvSpPr txBox="1"/>
+          <p:nvPr/>
+        </p:nvSpPr>
+        <p:spPr>
+          <a:xfrm>
+            <a:off x="731520" y="1234440"/>
+            <a:ext cx="6858000" cy="4937760"/>
+          </a:xfrm>
+          <a:prstGeom prst="rect">
+            <a:avLst/>
+          </a:prstGeom>
+          <a:noFill/>
+        </p:spPr>
+        <p:txBody>
+          <a:bodyPr wrap="square">
+            <a:spAutoFit/>
+          </a:bodyPr>
+          <a:lstStyle/>
+          <a:p>
+            <a:pPr>
+              <a:spcAft>
+                <a:spcPts val="200"/>
+              </a:spcAft>
+              <a:defRPr b="1" sz="1450">
+                <a:solidFill>
+                  <a:srgbClr val="0F1E4A"/>
+                </a:solidFill>
+              </a:defRPr>
+            </a:pPr>
+            <a:r>
+              <a:t>• Socket Abstraction</a:t>
+            </a:r>
+          </a:p>
+          <a:p>
+            <a:pPr>
+              <a:spcAft>
+                <a:spcPts val="700"/>
+              </a:spcAft>
+              <a:defRPr sz="1250">
+                <a:solidFill>
+                  <a:srgbClr val="0F172A"/>
+                </a:solidFill>
+              </a:defRPr>
+            </a:pPr>
+            <a:r>
+              <a:t>   A socket is a kernel endpoint for network I/O represented as an integer file descriptor in Linux (`int sockfd`).</a:t>
+            </a:r>
+          </a:p>
+          <a:p>
+            <a:pPr>
+              <a:spcAft>
+                <a:spcPts val="200"/>
+              </a:spcAft>
+              <a:defRPr b="1" sz="1450">
+                <a:solidFill>
+                  <a:srgbClr val="0F1E4A"/>
+                </a:solidFill>
+              </a:defRPr>
+            </a:pPr>
+            <a:r>
+              <a:t>• TCP Server Lifecycle</a:t>
+            </a:r>
+          </a:p>
+          <a:p>
+            <a:pPr>
+              <a:spcAft>
+                <a:spcPts val="700"/>
+              </a:spcAft>
+              <a:defRPr sz="1250">
+                <a:solidFill>
+                  <a:srgbClr val="0F172A"/>
+                </a:solidFill>
+              </a:defRPr>
+            </a:pPr>
+            <a:r>
+              <a:t>   1. `socket(AF_INET, SOCK_STREAM, 0)` -&gt; Creates endpoint \n 2. `bind(sockfd, &amp;addr, sizeof)` -&gt; Associates socket with IP/Port \n 3. `listen(sockfd, backlog)` -&gt; Sets passive listening mode and backlog queue \n 4. `accept(sockfd, &amp;client_addr, &amp;len)` -&gt; Blocks until client connects, returns new connected descriptor \n 5. `read()` / `write()` or `recv()` / `send()` -&gt; Data exchange \n 6. `close(sockfd)` -&gt; Tears down connection.</a:t>
+            </a:r>
+          </a:p>
+          <a:p>
+            <a:pPr>
+              <a:spcAft>
+                <a:spcPts val="200"/>
+              </a:spcAft>
+              <a:defRPr b="1" sz="1450">
+                <a:solidFill>
+                  <a:srgbClr val="0F1E4A"/>
+                </a:solidFill>
+              </a:defRPr>
+            </a:pPr>
+            <a:r>
+              <a:t>• TCP Client Lifecycle</a:t>
+            </a:r>
+          </a:p>
+          <a:p>
+            <a:pPr>
+              <a:spcAft>
+                <a:spcPts val="700"/>
+              </a:spcAft>
+              <a:defRPr sz="1250">
+                <a:solidFill>
+                  <a:srgbClr val="0F172A"/>
+                </a:solidFill>
+              </a:defRPr>
+            </a:pPr>
+            <a:r>
+              <a:t>   1. `socket()` -&gt; 2. `connect(sockfd, &amp;server_addr, sizeof)` (initiates 3-way handshake) -&gt; 3. `write()` / `read()` -&gt; 4. `close()`.</a:t>
+            </a:r>
+          </a:p>
+          <a:p>
+            <a:pPr>
+              <a:spcAft>
+                <a:spcPts val="200"/>
+              </a:spcAft>
+              <a:defRPr b="1" sz="1450">
+                <a:solidFill>
+                  <a:srgbClr val="0F1E4A"/>
+                </a:solidFill>
+              </a:defRPr>
+            </a:pPr>
+            <a:r>
+              <a:t>• UDP Sockets</a:t>
+            </a:r>
+          </a:p>
+          <a:p>
+            <a:pPr>
+              <a:spcAft>
+                <a:spcPts val="700"/>
+              </a:spcAft>
+              <a:defRPr sz="1250">
+                <a:solidFill>
+                  <a:srgbClr val="0F172A"/>
+                </a:solidFill>
+              </a:defRPr>
+            </a:pPr>
+            <a:r>
+              <a:t>   Connectionless: Server calls `socket()` -&gt; `bind()` -&gt; `recvfrom()` -&gt; `sendto()`. Client calls `socket()` -&gt; `sendto()` -&gt; `recvfrom()` without `listen()` or `accept()`.</a:t>
+            </a:r>
+          </a:p>
+        </p:txBody>
+      </p:sp>
+      <p:sp>
+        <p:nvSpPr>
+          <p:cNvPr id="7" name="Rounded Rectangle 6"/>
           <p:cNvSpPr/>
           <p:nvPr/>
         </p:nvSpPr>
         <p:spPr>
           <a:xfrm>
-            <a:off x="731520" y="1280160"/>
-            <a:ext cx="5212080" cy="4846320"/>
+            <a:off x="7955279" y="1234440"/>
+            <a:ext cx="3566160" cy="4892040"/>
           </a:xfrm>
           <a:prstGeom prst="roundRect">
             <a:avLst/>
           </a:prstGeom>
           <a:solidFill>
-            <a:srgbClr val="F1F5F9"/>
+            <a:srgbClr val="F8FAFC"/>
           </a:solidFill>
           <a:ln w="19050">
             <a:solidFill>
@@ -3489,14 +3771,14 @@
       </p:sp>
       <p:sp>
         <p:nvSpPr>
-          <p:cNvPr id="7" name="TextBox 6"/>
+          <p:cNvPr id="8" name="TextBox 7"/>
           <p:cNvSpPr txBox="1"/>
           <p:nvPr/>
         </p:nvSpPr>
         <p:spPr>
           <a:xfrm>
-            <a:off x="914400" y="1417320"/>
-            <a:ext cx="4846320" cy="4572000"/>
+            <a:off x="8138160" y="1371600"/>
+            <a:ext cx="3200400" cy="4572000"/>
           </a:xfrm>
           <a:prstGeom prst="rect">
             <a:avLst/>
@@ -3511,16 +3793,16 @@
           <a:p>
             <a:pPr>
               <a:spcAft>
-                <a:spcPts val="1200"/>
+                <a:spcPts val="1000"/>
               </a:spcAft>
-              <a:defRPr b="1" sz="1600">
-                <a:solidFill>
-                  <a:srgbClr val="0F1E4A"/>
+              <a:defRPr b="1" sz="1500">
+                <a:solidFill>
+                  <a:srgbClr val="0E7490"/>
                 </a:solidFill>
               </a:defRPr>
             </a:pPr>
             <a:r>
-              <a:t>TCP Socket Flow (Stream)</a:t>
+              <a:t>Key System Calls</a:t>
             </a:r>
           </a:p>
           <a:p>
@@ -3528,14 +3810,14 @@
               <a:spcAft>
                 <a:spcPts val="600"/>
               </a:spcAft>
-              <a:defRPr sz="1250">
-                <a:solidFill>
-                  <a:srgbClr val="1E293B"/>
+              <a:defRPr sz="1200">
+                <a:solidFill>
+                  <a:srgbClr val="0F172A"/>
                 </a:solidFill>
               </a:defRPr>
             </a:pPr>
             <a:r>
-              <a:t>• Server Sequence: `socket()` $\to$ `bind()` $\to$ `listen()` $\to$ `accept()` $\to$ `read()`/`write()` $\to$ `close()`</a:t>
+              <a:t>→ socket(): Create fd</a:t>
             </a:r>
           </a:p>
           <a:p>
@@ -3543,14 +3825,14 @@
               <a:spcAft>
                 <a:spcPts val="600"/>
               </a:spcAft>
-              <a:defRPr sz="1250">
-                <a:solidFill>
-                  <a:srgbClr val="1E293B"/>
+              <a:defRPr sz="1200">
+                <a:solidFill>
+                  <a:srgbClr val="0F172A"/>
                 </a:solidFill>
               </a:defRPr>
             </a:pPr>
             <a:r>
-              <a:t>• Client Sequence: `socket()` $\to$ `connect()` $\to$ `write()`/`read()` $\to$ `close()`</a:t>
+              <a:t>→ bind(): Bind IP &amp; Port</a:t>
             </a:r>
           </a:p>
           <a:p>
@@ -3558,14 +3840,14 @@
               <a:spcAft>
                 <a:spcPts val="600"/>
               </a:spcAft>
-              <a:defRPr sz="1250">
-                <a:solidFill>
-                  <a:srgbClr val="1E293B"/>
+              <a:defRPr sz="1200">
+                <a:solidFill>
+                  <a:srgbClr val="0F172A"/>
                 </a:solidFill>
               </a:defRPr>
             </a:pPr>
             <a:r>
-              <a:t>• `listen(sockfd, backlog)`: Prepares socket for incoming connections with connection backlog queue limit</a:t>
+              <a:t>→ listen(): Passive queue</a:t>
             </a:r>
           </a:p>
           <a:p>
@@ -3573,60 +3855,45 @@
               <a:spcAft>
                 <a:spcPts val="600"/>
               </a:spcAft>
-              <a:defRPr sz="1250">
-                <a:solidFill>
-                  <a:srgbClr val="1E293B"/>
+              <a:defRPr sz="1200">
+                <a:solidFill>
+                  <a:srgbClr val="0F172A"/>
                 </a:solidFill>
               </a:defRPr>
             </a:pPr>
             <a:r>
-              <a:t>• `accept()`: Blocks until connection arrives; returns NEW connected socket descriptor for client</a:t>
-            </a:r>
-          </a:p>
-        </p:txBody>
-      </p:sp>
-      <p:sp>
-        <p:nvSpPr>
-          <p:cNvPr id="8" name="Rounded Rectangle 7"/>
-          <p:cNvSpPr/>
-          <p:nvPr/>
-        </p:nvSpPr>
-        <p:spPr>
-          <a:xfrm>
-            <a:off x="6309360" y="1280160"/>
-            <a:ext cx="5212080" cy="4846320"/>
-          </a:xfrm>
-          <a:prstGeom prst="roundRect">
-            <a:avLst/>
-          </a:prstGeom>
-          <a:solidFill>
-            <a:srgbClr val="EEF2FF"/>
-          </a:solidFill>
-          <a:ln w="19050">
-            <a:solidFill>
-              <a:srgbClr val="0F1E4A"/>
-            </a:solidFill>
-          </a:ln>
-        </p:spPr>
-        <p:style>
-          <a:lnRef idx="1">
-            <a:schemeClr val="accent1"/>
-          </a:lnRef>
-          <a:fillRef idx="3">
-            <a:schemeClr val="accent1"/>
-          </a:fillRef>
-          <a:effectRef idx="2">
-            <a:schemeClr val="accent1"/>
-          </a:effectRef>
-          <a:fontRef idx="minor">
-            <a:schemeClr val="lt1"/>
-          </a:fontRef>
-        </p:style>
-        <p:txBody>
-          <a:bodyPr rtlCol="0" anchor="ctr"/>
-          <a:lstStyle/>
-          <a:p>
-            <a:pPr algn="ctr"/>
+              <a:t>→ accept(): Return client fd</a:t>
+            </a:r>
+          </a:p>
+          <a:p>
+            <a:pPr>
+              <a:spcAft>
+                <a:spcPts val="600"/>
+              </a:spcAft>
+              <a:defRPr sz="1200">
+                <a:solidFill>
+                  <a:srgbClr val="0F172A"/>
+                </a:solidFill>
+              </a:defRPr>
+            </a:pPr>
+            <a:r>
+              <a:t>→ connect(): 3-way handshake</a:t>
+            </a:r>
+          </a:p>
+          <a:p>
+            <a:pPr>
+              <a:spcAft>
+                <a:spcPts val="600"/>
+              </a:spcAft>
+              <a:defRPr sz="1200">
+                <a:solidFill>
+                  <a:srgbClr val="0F172A"/>
+                </a:solidFill>
+              </a:defRPr>
+            </a:pPr>
+            <a:r>
+              <a:t>→ sendto()/recvfrom(): UDP</a:t>
+            </a:r>
           </a:p>
         </p:txBody>
       </p:sp>
@@ -3638,8 +3905,8 @@
         </p:nvSpPr>
         <p:spPr>
           <a:xfrm>
-            <a:off x="6492240" y="1417320"/>
-            <a:ext cx="4846320" cy="4572000"/>
+            <a:off x="731520" y="6327648"/>
+            <a:ext cx="10789920" cy="320040"/>
           </a:xfrm>
           <a:prstGeom prst="rect">
             <a:avLst/>
@@ -3647,83 +3914,20 @@
           <a:noFill/>
         </p:spPr>
         <p:txBody>
-          <a:bodyPr wrap="square">
+          <a:bodyPr wrap="none">
             <a:spAutoFit/>
           </a:bodyPr>
           <a:lstStyle/>
           <a:p>
             <a:pPr>
-              <a:spcAft>
-                <a:spcPts val="1200"/>
-              </a:spcAft>
-              <a:defRPr b="1" sz="1600">
-                <a:solidFill>
-                  <a:srgbClr val="0E7490"/>
+              <a:defRPr sz="950">
+                <a:solidFill>
+                  <a:srgbClr val="64748B"/>
                 </a:solidFill>
               </a:defRPr>
             </a:pPr>
             <a:r>
-              <a:t>UDP Socket Flow (Datagram)</a:t>
-            </a:r>
-          </a:p>
-          <a:p>
-            <a:pPr>
-              <a:spcAft>
-                <a:spcPts val="600"/>
-              </a:spcAft>
-              <a:defRPr sz="1250">
-                <a:solidFill>
-                  <a:srgbClr val="1E293B"/>
-                </a:solidFill>
-              </a:defRPr>
-            </a:pPr>
-            <a:r>
-              <a:t>• Server Sequence: `socket()` $\to$ `bind()` $\to$ `recvfrom()` $\to$ `sendto()` $\to$ `close()`</a:t>
-            </a:r>
-          </a:p>
-          <a:p>
-            <a:pPr>
-              <a:spcAft>
-                <a:spcPts val="600"/>
-              </a:spcAft>
-              <a:defRPr sz="1250">
-                <a:solidFill>
-                  <a:srgbClr val="1E293B"/>
-                </a:solidFill>
-              </a:defRPr>
-            </a:pPr>
-            <a:r>
-              <a:t>• Client Sequence: `socket()` $\to$ `sendto()` $\to$ `recvfrom()` $\to$ `close()`</a:t>
-            </a:r>
-          </a:p>
-          <a:p>
-            <a:pPr>
-              <a:spcAft>
-                <a:spcPts val="600"/>
-              </a:spcAft>
-              <a:defRPr sz="1250">
-                <a:solidFill>
-                  <a:srgbClr val="1E293B"/>
-                </a:solidFill>
-              </a:defRPr>
-            </a:pPr>
-            <a:r>
-              <a:t>• Connectionless: No `listen()`, `connect()`, or `accept()` required</a:t>
-            </a:r>
-          </a:p>
-          <a:p>
-            <a:pPr>
-              <a:spcAft>
-                <a:spcPts val="600"/>
-              </a:spcAft>
-              <a:defRPr sz="1250">
-                <a:solidFill>
-                  <a:srgbClr val="1E293B"/>
-                </a:solidFill>
-              </a:defRPr>
-            </a:pPr>
-            <a:r>
-              <a:t>• `recvfrom()` / `sendto()`: Takes explicit destination `sockaddr_in` struct on every call</a:t>
+              <a:t>PCCST501 Computer Networks | KTU 2024 Scheme | Prof. Anju Markose | Assistant Professor, Dept. of CSE | VJCET</a:t>
             </a:r>
           </a:p>
         </p:txBody>
@@ -3736,8 +3940,8 @@
         </p:nvSpPr>
         <p:spPr>
           <a:xfrm>
-            <a:off x="731520" y="6309360"/>
-            <a:ext cx="10789920" cy="365760"/>
+            <a:off x="6858000" y="6327648"/>
+            <a:ext cx="4572000" cy="320040"/>
           </a:xfrm>
           <a:prstGeom prst="rect">
             <a:avLst/>
@@ -3750,7 +3954,7 @@
           </a:bodyPr>
           <a:lstStyle/>
           <a:p>
-            <a:pPr>
+            <a:pPr algn="r">
               <a:defRPr sz="950">
                 <a:solidFill>
                   <a:srgbClr val="64748B"/>
@@ -3758,7 +3962,7 @@
               </a:defRPr>
             </a:pPr>
             <a:r>
-              <a:t>PCCST501 Computer Networks | KTU 2024 Scheme | Prof. Anju Markose | Assistant Professor, Dept. of CSE | VJCET</a:t>
+              <a:t>Dept. of CSE, VJCET</a:t>
             </a:r>
           </a:p>
         </p:txBody>
@@ -3890,14 +4094,14 @@
           <a:lstStyle/>
           <a:p>
             <a:pPr>
-              <a:defRPr b="1" sz="2300">
+              <a:defRPr b="1" sz="2200">
                 <a:solidFill>
                   <a:srgbClr val="F8FAFC"/>
                 </a:solidFill>
               </a:defRPr>
             </a:pPr>
             <a:r>
-              <a:t>2.1.5.2 I/O Multiplexing: select() &amp; poll() Functions</a:t>
+              <a:t>2.1.5.2 I/O Multiplexing: `select()` System Call</a:t>
             </a:r>
           </a:p>
         </p:txBody>
@@ -3939,193 +4143,20 @@
       </p:sp>
       <p:sp>
         <p:nvSpPr>
-          <p:cNvPr id="6" name="TextBox 5"/>
-          <p:cNvSpPr txBox="1"/>
-          <p:nvPr/>
-        </p:nvSpPr>
-        <p:spPr>
-          <a:xfrm>
-            <a:off x="731520" y="1280160"/>
-            <a:ext cx="6858000" cy="4937760"/>
-          </a:xfrm>
-          <a:prstGeom prst="rect">
-            <a:avLst/>
-          </a:prstGeom>
-          <a:noFill/>
-        </p:spPr>
-        <p:txBody>
-          <a:bodyPr wrap="square">
-            <a:spAutoFit/>
-          </a:bodyPr>
-          <a:lstStyle/>
-          <a:p>
-            <a:pPr>
-              <a:spcAft>
-                <a:spcPts val="200"/>
-              </a:spcAft>
-              <a:defRPr b="1" sz="1500">
-                <a:solidFill>
-                  <a:srgbClr val="0F1E4A"/>
-                </a:solidFill>
-              </a:defRPr>
-            </a:pPr>
-            <a:r>
-              <a:t>• Motivation for I/O Multiplexing</a:t>
-            </a:r>
-          </a:p>
-          <a:p>
-            <a:pPr>
-              <a:spcAft>
-                <a:spcPts val="800"/>
-              </a:spcAft>
-              <a:defRPr sz="1300">
-                <a:solidFill>
-                  <a:srgbClr val="1E293B"/>
-                </a:solidFill>
-              </a:defRPr>
-            </a:pPr>
-            <a:r>
-              <a:t>   Allows a single-threaded server process to monitor multiple active file/socket descriptors simultaneously without blocking on any single socket or spawning thousands of threads.</a:t>
-            </a:r>
-          </a:p>
-          <a:p>
-            <a:pPr>
-              <a:spcAft>
-                <a:spcPts val="200"/>
-              </a:spcAft>
-              <a:defRPr b="1" sz="1500">
-                <a:solidFill>
-                  <a:srgbClr val="0F1E4A"/>
-                </a:solidFill>
-              </a:defRPr>
-            </a:pPr>
-            <a:r>
-              <a:t>• `select()` System Call</a:t>
-            </a:r>
-          </a:p>
-          <a:p>
-            <a:pPr>
-              <a:spcAft>
-                <a:spcPts val="800"/>
-              </a:spcAft>
-              <a:defRPr sz="1300">
-                <a:solidFill>
-                  <a:srgbClr val="1E293B"/>
-                </a:solidFill>
-              </a:defRPr>
-            </a:pPr>
-            <a:r>
-              <a:t>   `int select(int maxfdp1, fd_set *readfds, fd_set *writefds, fd_set *exceptfds, struct timeval *timeout)`.</a:t>
-            </a:r>
-          </a:p>
-          <a:p>
-            <a:pPr>
-              <a:spcAft>
-                <a:spcPts val="200"/>
-              </a:spcAft>
-              <a:defRPr b="1" sz="1500">
-                <a:solidFill>
-                  <a:srgbClr val="0F1E4A"/>
-                </a:solidFill>
-              </a:defRPr>
-            </a:pPr>
-            <a:r>
-              <a:t>• `fd_set` Bitmask Operations</a:t>
-            </a:r>
-          </a:p>
-          <a:p>
-            <a:pPr>
-              <a:spcAft>
-                <a:spcPts val="800"/>
-              </a:spcAft>
-              <a:defRPr sz="1300">
-                <a:solidFill>
-                  <a:srgbClr val="1E293B"/>
-                </a:solidFill>
-              </a:defRPr>
-            </a:pPr>
-            <a:r>
-              <a:t>   `FD_ZERO(&amp;set)`, `FD_SET(fd, &amp;set)`, `FD_CLR(fd, &amp;set)`, `FD_ISSET(fd, &amp;set)`. Limited by `FD_SETSIZE` (typically 1024 descriptors).</a:t>
-            </a:r>
-          </a:p>
-          <a:p>
-            <a:pPr>
-              <a:spcAft>
-                <a:spcPts val="200"/>
-              </a:spcAft>
-              <a:defRPr b="1" sz="1500">
-                <a:solidFill>
-                  <a:srgbClr val="0F1E4A"/>
-                </a:solidFill>
-              </a:defRPr>
-            </a:pPr>
-            <a:r>
-              <a:t>• `poll()` System Call</a:t>
-            </a:r>
-          </a:p>
-          <a:p>
-            <a:pPr>
-              <a:spcAft>
-                <a:spcPts val="800"/>
-              </a:spcAft>
-              <a:defRPr sz="1300">
-                <a:solidFill>
-                  <a:srgbClr val="1E293B"/>
-                </a:solidFill>
-              </a:defRPr>
-            </a:pPr>
-            <a:r>
-              <a:t>   `int poll(struct pollfd fds[], nfds_t nfds, int timeout)`. Uses array of structures with event bitmasks (`POLLIN`, `POLLOUT`, `POLLERR`). Eliminates `FD_SETSIZE` descriptor limits.</a:t>
-            </a:r>
-          </a:p>
-          <a:p>
-            <a:pPr>
-              <a:spcAft>
-                <a:spcPts val="200"/>
-              </a:spcAft>
-              <a:defRPr b="1" sz="1500">
-                <a:solidFill>
-                  <a:srgbClr val="0F1E4A"/>
-                </a:solidFill>
-              </a:defRPr>
-            </a:pPr>
-            <a:r>
-              <a:t>• Event Notification</a:t>
-            </a:r>
-          </a:p>
-          <a:p>
-            <a:pPr>
-              <a:spcAft>
-                <a:spcPts val="800"/>
-              </a:spcAft>
-              <a:defRPr sz="1300">
-                <a:solidFill>
-                  <a:srgbClr val="1E293B"/>
-                </a:solidFill>
-              </a:defRPr>
-            </a:pPr>
-            <a:r>
-              <a:t>   Both calls block until one or more monitored descriptors become ready for I/O reading/writing, waking the main event loop.</a:t>
-            </a:r>
-          </a:p>
-        </p:txBody>
-      </p:sp>
-      <p:sp>
-        <p:nvSpPr>
-          <p:cNvPr id="7" name="Rounded Rectangle 6"/>
+          <p:cNvPr id="6" name="Rounded Rectangle 5"/>
           <p:cNvSpPr/>
           <p:nvPr/>
         </p:nvSpPr>
         <p:spPr>
           <a:xfrm>
-            <a:off x="7955279" y="1280160"/>
-            <a:ext cx="3566160" cy="4846320"/>
+            <a:off x="731520" y="1234440"/>
+            <a:ext cx="6217920" cy="4892040"/>
           </a:xfrm>
           <a:prstGeom prst="roundRect">
             <a:avLst/>
           </a:prstGeom>
           <a:solidFill>
-            <a:srgbClr val="F1F5F9"/>
+            <a:srgbClr val="0F172A"/>
           </a:solidFill>
           <a:ln w="19050">
             <a:solidFill>
@@ -4157,14 +4188,14 @@
       </p:sp>
       <p:sp>
         <p:nvSpPr>
-          <p:cNvPr id="8" name="TextBox 7"/>
+          <p:cNvPr id="7" name="TextBox 6"/>
           <p:cNvSpPr txBox="1"/>
           <p:nvPr/>
         </p:nvSpPr>
         <p:spPr>
           <a:xfrm>
-            <a:off x="8138160" y="1417320"/>
-            <a:ext cx="3200400" cy="4572000"/>
+            <a:off x="868680" y="1325880"/>
+            <a:ext cx="5943600" cy="4663440"/>
           </a:xfrm>
           <a:prstGeom prst="rect">
             <a:avLst/>
@@ -4179,16 +4210,181 @@
           <a:p>
             <a:pPr>
               <a:spcAft>
-                <a:spcPts val="1000"/>
+                <a:spcPts val="600"/>
               </a:spcAft>
-              <a:defRPr b="1" sz="1500">
-                <a:solidFill>
-                  <a:srgbClr val="0E7490"/>
+              <a:defRPr b="1" sz="1100">
+                <a:solidFill>
+                  <a:srgbClr val="D97706"/>
                 </a:solidFill>
               </a:defRPr>
             </a:pPr>
             <a:r>
-              <a:t>Key Takeaways</a:t>
+              <a:t>// Linux Socket &amp; Protocol Implementation</a:t>
+            </a:r>
+          </a:p>
+          <a:p>
+            <a:pPr>
+              <a:defRPr sz="1050">
+                <a:solidFill>
+                  <a:srgbClr val="E2E8F0"/>
+                </a:solidFill>
+                <a:latin typeface="Consolas"/>
+              </a:defRPr>
+            </a:pPr>
+            <a:r>
+              <a:t>#include &lt;sys/select.h&gt;</a:t>
+            </a:r>
+            <a:br/>
+            <a:r>
+              <a:t>int max_fd = listen_fd;</a:t>
+            </a:r>
+            <a:br/>
+            <a:r>
+              <a:t>fd_set read_fds;</a:t>
+            </a:r>
+            <a:br/>
+            <a:br/>
+            <a:r>
+              <a:t>while (1) {</a:t>
+            </a:r>
+            <a:br/>
+            <a:r>
+              <a:t>    FD_ZERO(&amp;read_fds);</a:t>
+            </a:r>
+            <a:br/>
+            <a:r>
+              <a:t>    FD_SET(listen_fd, &amp;read_fds);</a:t>
+            </a:r>
+            <a:br/>
+            <a:r>
+              <a:t>    // Add active client descriptors</a:t>
+            </a:r>
+            <a:br/>
+            <a:r>
+              <a:t>    for (int i = 0; i &lt; max_clients; i++) {</a:t>
+            </a:r>
+            <a:br/>
+            <a:r>
+              <a:t>        if (client_fds[i] &gt; 0) FD_SET(client_fds[i], &amp;read_fds);</a:t>
+            </a:r>
+            <a:br/>
+            <a:r>
+              <a:t>        if (client_fds[i] &gt; max_fd) max_fd = client_fds[i];</a:t>
+            </a:r>
+            <a:br/>
+            <a:r>
+              <a:t>    }</a:t>
+            </a:r>
+            <a:br/>
+            <a:r>
+              <a:t>    // Block until at least one descriptor is ready for read</a:t>
+            </a:r>
+            <a:br/>
+            <a:r>
+              <a:t>    int activity = select(max_fd + 1, &amp;read_fds, NULL, NULL, NULL);</a:t>
+            </a:r>
+            <a:br/>
+            <a:r>
+              <a:t>    if (FD_ISSET(listen_fd, &amp;read_fds)) {</a:t>
+            </a:r>
+            <a:br/>
+            <a:r>
+              <a:t>        int new_fd = accept(listen_fd, ...);</a:t>
+            </a:r>
+            <a:br/>
+            <a:r>
+              <a:t>        // Add new_fd to client list</a:t>
+            </a:r>
+            <a:br/>
+            <a:r>
+              <a:t>    }</a:t>
+            </a:r>
+            <a:br/>
+            <a:r>
+              <a:t>}</a:t>
+            </a:r>
+          </a:p>
+        </p:txBody>
+      </p:sp>
+      <p:sp>
+        <p:nvSpPr>
+          <p:cNvPr id="8" name="Rounded Rectangle 7"/>
+          <p:cNvSpPr/>
+          <p:nvPr/>
+        </p:nvSpPr>
+        <p:spPr>
+          <a:xfrm>
+            <a:off x="7132320" y="1234440"/>
+            <a:ext cx="4389120" cy="4892040"/>
+          </a:xfrm>
+          <a:prstGeom prst="roundRect">
+            <a:avLst/>
+          </a:prstGeom>
+          <a:solidFill>
+            <a:srgbClr val="F8FAFC"/>
+          </a:solidFill>
+          <a:ln w="19050">
+            <a:solidFill>
+              <a:srgbClr val="0F1E4A"/>
+            </a:solidFill>
+          </a:ln>
+        </p:spPr>
+        <p:style>
+          <a:lnRef idx="1">
+            <a:schemeClr val="accent1"/>
+          </a:lnRef>
+          <a:fillRef idx="3">
+            <a:schemeClr val="accent1"/>
+          </a:fillRef>
+          <a:effectRef idx="2">
+            <a:schemeClr val="accent1"/>
+          </a:effectRef>
+          <a:fontRef idx="minor">
+            <a:schemeClr val="lt1"/>
+          </a:fontRef>
+        </p:style>
+        <p:txBody>
+          <a:bodyPr rtlCol="0" anchor="ctr"/>
+          <a:lstStyle/>
+          <a:p>
+            <a:pPr algn="ctr"/>
+          </a:p>
+        </p:txBody>
+      </p:sp>
+      <p:sp>
+        <p:nvSpPr>
+          <p:cNvPr id="9" name="TextBox 8"/>
+          <p:cNvSpPr txBox="1"/>
+          <p:nvPr/>
+        </p:nvSpPr>
+        <p:spPr>
+          <a:xfrm>
+            <a:off x="7315200" y="1371600"/>
+            <a:ext cx="4023360" cy="4572000"/>
+          </a:xfrm>
+          <a:prstGeom prst="rect">
+            <a:avLst/>
+          </a:prstGeom>
+          <a:noFill/>
+        </p:spPr>
+        <p:txBody>
+          <a:bodyPr wrap="square">
+            <a:spAutoFit/>
+          </a:bodyPr>
+          <a:lstStyle/>
+          <a:p>
+            <a:pPr>
+              <a:spcAft>
+                <a:spcPts val="800"/>
+              </a:spcAft>
+              <a:defRPr b="1" sz="1400">
+                <a:solidFill>
+                  <a:srgbClr val="0F1E4A"/>
+                </a:solidFill>
+              </a:defRPr>
+            </a:pPr>
+            <a:r>
+              <a:t>⚙️ System Call &amp; Execution Workflow</a:t>
             </a:r>
           </a:p>
           <a:p>
@@ -4198,12 +4394,12 @@
               </a:spcAft>
               <a:defRPr sz="1200">
                 <a:solidFill>
-                  <a:srgbClr val="1E293B"/>
+                  <a:srgbClr val="0F172A"/>
                 </a:solidFill>
               </a:defRPr>
             </a:pPr>
             <a:r>
-              <a:t>→ select(): Bitmasks, 1024 limit</a:t>
+              <a:t>• Why I/O Multiplexing?: Allows a single-threaded server process to monitor multiple socket descriptors simultaneously without blocking on any single slow client.</a:t>
             </a:r>
           </a:p>
           <a:p>
@@ -4213,12 +4409,12 @@
               </a:spcAft>
               <a:defRPr sz="1200">
                 <a:solidFill>
-                  <a:srgbClr val="1E293B"/>
+                  <a:srgbClr val="0F172A"/>
                 </a:solidFill>
               </a:defRPr>
             </a:pPr>
             <a:r>
-              <a:t>→ poll(): Array of structs, unlimited</a:t>
+              <a:t>• `fd_set` Bitmask Macros: `FD_ZERO(&amp;set)` clears mask, `FD_SET(fd, &amp;set)` adds fd, `FD_CLR(fd, &amp;set)` removes fd, `FD_ISSET(fd, &amp;set)` tests readiness.</a:t>
             </a:r>
           </a:p>
           <a:p>
@@ -4228,12 +4424,12 @@
               </a:spcAft>
               <a:defRPr sz="1200">
                 <a:solidFill>
-                  <a:srgbClr val="1E293B"/>
+                  <a:srgbClr val="0F172A"/>
                 </a:solidFill>
               </a:defRPr>
             </a:pPr>
             <a:r>
-              <a:t>→ Non-blocking server architecture</a:t>
+              <a:t>• `select()` Parameters: `int select(int nfds, fd_set *readfds, fd_set *writefds, fd_set *exceptfds, struct timeval *timeout)`. `nfds` is `max_fd + 1`.</a:t>
             </a:r>
           </a:p>
           <a:p>
@@ -4243,26 +4439,38 @@
               </a:spcAft>
               <a:defRPr sz="1200">
                 <a:solidFill>
-                  <a:srgbClr val="1E293B"/>
+                  <a:srgbClr val="0F172A"/>
                 </a:solidFill>
               </a:defRPr>
             </a:pPr>
             <a:r>
-              <a:t>→ Foundation of modern event loops (epoll/nginx/node)</a:t>
-            </a:r>
-          </a:p>
-        </p:txBody>
-      </p:sp>
-      <p:sp>
-        <p:nvSpPr>
-          <p:cNvPr id="9" name="TextBox 8"/>
+              <a:t>• `poll()` vs `select()`: `poll()` uses array of `struct pollfd` (no `FD_SETSIZE` 1024 descriptor limit and separate input/output events).</a:t>
+            </a:r>
+          </a:p>
+          <a:p>
+            <a:pPr>
+              <a:defRPr b="1" sz="1150">
+                <a:solidFill>
+                  <a:srgbClr val="0E7490"/>
+                </a:solidFill>
+              </a:defRPr>
+            </a:pPr>
+            <a:r>
+              <a:t>💡 Hands-on Insight: Single-threaded I/O multiplexing handles hundreds of concurrent connections with minimal memory overhead compared to multi-threading.</a:t>
+            </a:r>
+          </a:p>
+        </p:txBody>
+      </p:sp>
+      <p:sp>
+        <p:nvSpPr>
+          <p:cNvPr id="10" name="TextBox 9"/>
           <p:cNvSpPr txBox="1"/>
           <p:nvPr/>
         </p:nvSpPr>
         <p:spPr>
           <a:xfrm>
-            <a:off x="731520" y="6309360"/>
-            <a:ext cx="10789920" cy="365760"/>
+            <a:off x="731520" y="6327648"/>
+            <a:ext cx="10789920" cy="320040"/>
           </a:xfrm>
           <a:prstGeom prst="rect">
             <a:avLst/>
@@ -4284,6 +4492,541 @@
             </a:pPr>
             <a:r>
               <a:t>PCCST501 Computer Networks | KTU 2024 Scheme | Prof. Anju Markose | Assistant Professor, Dept. of CSE | VJCET</a:t>
+            </a:r>
+          </a:p>
+        </p:txBody>
+      </p:sp>
+      <p:sp>
+        <p:nvSpPr>
+          <p:cNvPr id="11" name="TextBox 10"/>
+          <p:cNvSpPr txBox="1"/>
+          <p:nvPr/>
+        </p:nvSpPr>
+        <p:spPr>
+          <a:xfrm>
+            <a:off x="6858000" y="6327648"/>
+            <a:ext cx="4572000" cy="320040"/>
+          </a:xfrm>
+          <a:prstGeom prst="rect">
+            <a:avLst/>
+          </a:prstGeom>
+          <a:noFill/>
+        </p:spPr>
+        <p:txBody>
+          <a:bodyPr wrap="none">
+            <a:spAutoFit/>
+          </a:bodyPr>
+          <a:lstStyle/>
+          <a:p>
+            <a:pPr algn="r">
+              <a:defRPr sz="950">
+                <a:solidFill>
+                  <a:srgbClr val="64748B"/>
+                </a:solidFill>
+              </a:defRPr>
+            </a:pPr>
+            <a:r>
+              <a:t>Dept. of CSE, VJCET</a:t>
+            </a:r>
+          </a:p>
+        </p:txBody>
+      </p:sp>
+    </p:spTree>
+  </p:cSld>
+  <p:clrMapOvr>
+    <a:masterClrMapping/>
+  </p:clrMapOvr>
+</p:sld>
+</file>
+
+<file path=ppt/slides/slide4.xml><?xml version="1.0" encoding="utf-8"?>
+<p:sld xmlns:a="http://schemas.openxmlformats.org/drawingml/2006/main" xmlns:p="http://schemas.openxmlformats.org/presentationml/2006/main" xmlns:r="http://schemas.openxmlformats.org/officeDocument/2006/relationships">
+  <p:cSld>
+    <p:spTree>
+      <p:nvGrpSpPr>
+        <p:cNvPr id="1" name=""/>
+        <p:cNvGrpSpPr/>
+        <p:nvPr/>
+      </p:nvGrpSpPr>
+      <p:grpSpPr/>
+      <p:sp>
+        <p:nvSpPr>
+          <p:cNvPr id="2" name="Rectangle 1"/>
+          <p:cNvSpPr/>
+          <p:nvPr/>
+        </p:nvSpPr>
+        <p:spPr>
+          <a:xfrm>
+            <a:off x="0" y="0"/>
+            <a:ext cx="12191695" cy="1005840"/>
+          </a:xfrm>
+          <a:prstGeom prst="rect">
+            <a:avLst/>
+          </a:prstGeom>
+          <a:solidFill>
+            <a:srgbClr val="0F1E4A"/>
+          </a:solidFill>
+          <a:ln>
+            <a:noFill/>
+          </a:ln>
+        </p:spPr>
+        <p:style>
+          <a:lnRef idx="1">
+            <a:schemeClr val="accent1"/>
+          </a:lnRef>
+          <a:fillRef idx="3">
+            <a:schemeClr val="accent1"/>
+          </a:fillRef>
+          <a:effectRef idx="2">
+            <a:schemeClr val="accent1"/>
+          </a:effectRef>
+          <a:fontRef idx="minor">
+            <a:schemeClr val="lt1"/>
+          </a:fontRef>
+        </p:style>
+        <p:txBody>
+          <a:bodyPr rtlCol="0" anchor="ctr"/>
+          <a:lstStyle/>
+          <a:p>
+            <a:pPr algn="ctr"/>
+          </a:p>
+        </p:txBody>
+      </p:sp>
+      <p:sp>
+        <p:nvSpPr>
+          <p:cNvPr id="3" name="Rectangle 2"/>
+          <p:cNvSpPr/>
+          <p:nvPr/>
+        </p:nvSpPr>
+        <p:spPr>
+          <a:xfrm>
+            <a:off x="0" y="969264"/>
+            <a:ext cx="12191695" cy="36576"/>
+          </a:xfrm>
+          <a:prstGeom prst="rect">
+            <a:avLst/>
+          </a:prstGeom>
+          <a:solidFill>
+            <a:srgbClr val="D97706"/>
+          </a:solidFill>
+          <a:ln>
+            <a:noFill/>
+          </a:ln>
+        </p:spPr>
+        <p:style>
+          <a:lnRef idx="1">
+            <a:schemeClr val="accent1"/>
+          </a:lnRef>
+          <a:fillRef idx="3">
+            <a:schemeClr val="accent1"/>
+          </a:fillRef>
+          <a:effectRef idx="2">
+            <a:schemeClr val="accent1"/>
+          </a:effectRef>
+          <a:fontRef idx="minor">
+            <a:schemeClr val="lt1"/>
+          </a:fontRef>
+        </p:style>
+        <p:txBody>
+          <a:bodyPr rtlCol="0" anchor="ctr"/>
+          <a:lstStyle/>
+          <a:p>
+            <a:pPr algn="ctr"/>
+          </a:p>
+        </p:txBody>
+      </p:sp>
+      <p:sp>
+        <p:nvSpPr>
+          <p:cNvPr id="4" name="TextBox 3"/>
+          <p:cNvSpPr txBox="1"/>
+          <p:nvPr/>
+        </p:nvSpPr>
+        <p:spPr>
+          <a:xfrm>
+            <a:off x="731520" y="164592"/>
+            <a:ext cx="8412480" cy="685800"/>
+          </a:xfrm>
+          <a:prstGeom prst="rect">
+            <a:avLst/>
+          </a:prstGeom>
+          <a:noFill/>
+        </p:spPr>
+        <p:txBody>
+          <a:bodyPr wrap="none">
+            <a:spAutoFit/>
+          </a:bodyPr>
+          <a:lstStyle/>
+          <a:p>
+            <a:pPr>
+              <a:defRPr b="1" sz="2100">
+                <a:solidFill>
+                  <a:srgbClr val="F8FAFC"/>
+                </a:solidFill>
+              </a:defRPr>
+            </a:pPr>
+            <a:r>
+              <a:t>🎯 Exam Booster &amp; Review: Socket API &amp; select()</a:t>
+            </a:r>
+          </a:p>
+        </p:txBody>
+      </p:sp>
+      <p:sp>
+        <p:nvSpPr>
+          <p:cNvPr id="5" name="TextBox 4"/>
+          <p:cNvSpPr txBox="1"/>
+          <p:nvPr/>
+        </p:nvSpPr>
+        <p:spPr>
+          <a:xfrm>
+            <a:off x="8229600" y="164592"/>
+            <a:ext cx="3291840" cy="685800"/>
+          </a:xfrm>
+          <a:prstGeom prst="rect">
+            <a:avLst/>
+          </a:prstGeom>
+          <a:noFill/>
+        </p:spPr>
+        <p:txBody>
+          <a:bodyPr wrap="none">
+            <a:spAutoFit/>
+          </a:bodyPr>
+          <a:lstStyle/>
+          <a:p>
+            <a:pPr algn="r">
+              <a:defRPr b="1" sz="1300">
+                <a:solidFill>
+                  <a:srgbClr val="D97706"/>
+                </a:solidFill>
+              </a:defRPr>
+            </a:pPr>
+            <a:r>
+              <a:t>M2.1.5</a:t>
+            </a:r>
+          </a:p>
+        </p:txBody>
+      </p:sp>
+      <p:sp>
+        <p:nvSpPr>
+          <p:cNvPr id="6" name="Rounded Rectangle 5"/>
+          <p:cNvSpPr/>
+          <p:nvPr/>
+        </p:nvSpPr>
+        <p:spPr>
+          <a:xfrm>
+            <a:off x="731520" y="1234440"/>
+            <a:ext cx="5303520" cy="4892040"/>
+          </a:xfrm>
+          <a:prstGeom prst="roundRect">
+            <a:avLst/>
+          </a:prstGeom>
+          <a:solidFill>
+            <a:srgbClr val="FEF3C7"/>
+          </a:solidFill>
+          <a:ln w="19050">
+            <a:solidFill>
+              <a:srgbClr val="D97706"/>
+            </a:solidFill>
+          </a:ln>
+        </p:spPr>
+        <p:style>
+          <a:lnRef idx="1">
+            <a:schemeClr val="accent1"/>
+          </a:lnRef>
+          <a:fillRef idx="3">
+            <a:schemeClr val="accent1"/>
+          </a:fillRef>
+          <a:effectRef idx="2">
+            <a:schemeClr val="accent1"/>
+          </a:effectRef>
+          <a:fontRef idx="minor">
+            <a:schemeClr val="lt1"/>
+          </a:fontRef>
+        </p:style>
+        <p:txBody>
+          <a:bodyPr rtlCol="0" anchor="ctr"/>
+          <a:lstStyle/>
+          <a:p>
+            <a:pPr algn="ctr"/>
+          </a:p>
+        </p:txBody>
+      </p:sp>
+      <p:sp>
+        <p:nvSpPr>
+          <p:cNvPr id="7" name="TextBox 6"/>
+          <p:cNvSpPr txBox="1"/>
+          <p:nvPr/>
+        </p:nvSpPr>
+        <p:spPr>
+          <a:xfrm>
+            <a:off x="914400" y="1371600"/>
+            <a:ext cx="4937760" cy="4572000"/>
+          </a:xfrm>
+          <a:prstGeom prst="rect">
+            <a:avLst/>
+          </a:prstGeom>
+          <a:noFill/>
+        </p:spPr>
+        <p:txBody>
+          <a:bodyPr wrap="square">
+            <a:spAutoFit/>
+          </a:bodyPr>
+          <a:lstStyle/>
+          <a:p>
+            <a:pPr>
+              <a:spcAft>
+                <a:spcPts val="1000"/>
+              </a:spcAft>
+              <a:defRPr b="1" sz="1450">
+                <a:solidFill>
+                  <a:srgbClr val="D97706"/>
+                </a:solidFill>
+              </a:defRPr>
+            </a:pPr>
+            <a:r>
+              <a:t>📚 KTU High-Yield Questions (K3 Apply)</a:t>
+            </a:r>
+          </a:p>
+          <a:p>
+            <a:pPr>
+              <a:spcAft>
+                <a:spcPts val="700"/>
+              </a:spcAft>
+              <a:defRPr sz="1200">
+                <a:solidFill>
+                  <a:srgbClr val="0F172A"/>
+                </a:solidFill>
+              </a:defRPr>
+            </a:pPr>
+            <a:r>
+              <a:t>Q: Write the sequence of Berkeley socket system calls executed on both server and client for TCP connection establishment and data transfer. (8 Marks)</a:t>
+            </a:r>
+          </a:p>
+          <a:p>
+            <a:pPr>
+              <a:spcAft>
+                <a:spcPts val="700"/>
+              </a:spcAft>
+              <a:defRPr sz="1200">
+                <a:solidFill>
+                  <a:srgbClr val="0F172A"/>
+                </a:solidFill>
+              </a:defRPr>
+            </a:pPr>
+            <a:r>
+              <a:t>Q: Explain the working of I/O multiplexing using the `select()` system call with code structure and `fd_set` macros. (8 Marks)</a:t>
+            </a:r>
+          </a:p>
+          <a:p>
+            <a:pPr>
+              <a:spcAft>
+                <a:spcPts val="700"/>
+              </a:spcAft>
+              <a:defRPr sz="1200">
+                <a:solidFill>
+                  <a:srgbClr val="0F172A"/>
+                </a:solidFill>
+              </a:defRPr>
+            </a:pPr>
+            <a:r>
+              <a:t>Q: Differentiate between blocking, non-blocking, and I/O multiplexed socket architectures. (6 Marks)</a:t>
+            </a:r>
+          </a:p>
+        </p:txBody>
+      </p:sp>
+      <p:sp>
+        <p:nvSpPr>
+          <p:cNvPr id="8" name="Rounded Rectangle 7"/>
+          <p:cNvSpPr/>
+          <p:nvPr/>
+        </p:nvSpPr>
+        <p:spPr>
+          <a:xfrm>
+            <a:off x="6309360" y="1234440"/>
+            <a:ext cx="5212080" cy="4892040"/>
+          </a:xfrm>
+          <a:prstGeom prst="roundRect">
+            <a:avLst/>
+          </a:prstGeom>
+          <a:solidFill>
+            <a:srgbClr val="EEF2FF"/>
+          </a:solidFill>
+          <a:ln w="19050">
+            <a:solidFill>
+              <a:srgbClr val="0E7490"/>
+            </a:solidFill>
+          </a:ln>
+        </p:spPr>
+        <p:style>
+          <a:lnRef idx="1">
+            <a:schemeClr val="accent1"/>
+          </a:lnRef>
+          <a:fillRef idx="3">
+            <a:schemeClr val="accent1"/>
+          </a:fillRef>
+          <a:effectRef idx="2">
+            <a:schemeClr val="accent1"/>
+          </a:effectRef>
+          <a:fontRef idx="minor">
+            <a:schemeClr val="lt1"/>
+          </a:fontRef>
+        </p:style>
+        <p:txBody>
+          <a:bodyPr rtlCol="0" anchor="ctr"/>
+          <a:lstStyle/>
+          <a:p>
+            <a:pPr algn="ctr"/>
+          </a:p>
+        </p:txBody>
+      </p:sp>
+      <p:sp>
+        <p:nvSpPr>
+          <p:cNvPr id="9" name="TextBox 8"/>
+          <p:cNvSpPr txBox="1"/>
+          <p:nvPr/>
+        </p:nvSpPr>
+        <p:spPr>
+          <a:xfrm>
+            <a:off x="6492240" y="1371600"/>
+            <a:ext cx="4846320" cy="4572000"/>
+          </a:xfrm>
+          <a:prstGeom prst="rect">
+            <a:avLst/>
+          </a:prstGeom>
+          <a:noFill/>
+        </p:spPr>
+        <p:txBody>
+          <a:bodyPr wrap="square">
+            <a:spAutoFit/>
+          </a:bodyPr>
+          <a:lstStyle/>
+          <a:p>
+            <a:pPr>
+              <a:spcAft>
+                <a:spcPts val="1000"/>
+              </a:spcAft>
+              <a:defRPr b="1" sz="1450">
+                <a:solidFill>
+                  <a:srgbClr val="0E7490"/>
+                </a:solidFill>
+              </a:defRPr>
+            </a:pPr>
+            <a:r>
+              <a:t>💡 Critical Conceptual Takeaways</a:t>
+            </a:r>
+          </a:p>
+          <a:p>
+            <a:pPr>
+              <a:spcAft>
+                <a:spcPts val="600"/>
+              </a:spcAft>
+              <a:defRPr sz="1200">
+                <a:solidFill>
+                  <a:srgbClr val="0F172A"/>
+                </a:solidFill>
+              </a:defRPr>
+            </a:pPr>
+            <a:r>
+              <a:t>✔ `listen()` creates a passive socket queue; `accept()` extracts the next connection from the queue.</a:t>
+            </a:r>
+          </a:p>
+          <a:p>
+            <a:pPr>
+              <a:spcAft>
+                <a:spcPts val="600"/>
+              </a:spcAft>
+              <a:defRPr sz="1200">
+                <a:solidFill>
+                  <a:srgbClr val="0F172A"/>
+                </a:solidFill>
+              </a:defRPr>
+            </a:pPr>
+            <a:r>
+              <a:t>✔ `select()` monitors multiple file descriptors simultaneously, unblocking as soon as any fd is ready.</a:t>
+            </a:r>
+          </a:p>
+          <a:p>
+            <a:pPr>
+              <a:spcAft>
+                <a:spcPts val="600"/>
+              </a:spcAft>
+              <a:defRPr sz="1200">
+                <a:solidFill>
+                  <a:srgbClr val="0F172A"/>
+                </a:solidFill>
+              </a:defRPr>
+            </a:pPr>
+            <a:r>
+              <a:t>✔ `poll()` and `epoll()` overcome the 1024 file descriptor limitation of traditional `select()`.</a:t>
+            </a:r>
+          </a:p>
+        </p:txBody>
+      </p:sp>
+      <p:sp>
+        <p:nvSpPr>
+          <p:cNvPr id="10" name="TextBox 9"/>
+          <p:cNvSpPr txBox="1"/>
+          <p:nvPr/>
+        </p:nvSpPr>
+        <p:spPr>
+          <a:xfrm>
+            <a:off x="731520" y="6327648"/>
+            <a:ext cx="10789920" cy="320040"/>
+          </a:xfrm>
+          <a:prstGeom prst="rect">
+            <a:avLst/>
+          </a:prstGeom>
+          <a:noFill/>
+        </p:spPr>
+        <p:txBody>
+          <a:bodyPr wrap="none">
+            <a:spAutoFit/>
+          </a:bodyPr>
+          <a:lstStyle/>
+          <a:p>
+            <a:pPr>
+              <a:defRPr sz="950">
+                <a:solidFill>
+                  <a:srgbClr val="64748B"/>
+                </a:solidFill>
+              </a:defRPr>
+            </a:pPr>
+            <a:r>
+              <a:t>PCCST501 Computer Networks | KTU 2024 Scheme | Prof. Anju Markose | Assistant Professor, Dept. of CSE | VJCET</a:t>
+            </a:r>
+          </a:p>
+        </p:txBody>
+      </p:sp>
+      <p:sp>
+        <p:nvSpPr>
+          <p:cNvPr id="11" name="TextBox 10"/>
+          <p:cNvSpPr txBox="1"/>
+          <p:nvPr/>
+        </p:nvSpPr>
+        <p:spPr>
+          <a:xfrm>
+            <a:off x="6858000" y="6327648"/>
+            <a:ext cx="4572000" cy="320040"/>
+          </a:xfrm>
+          <a:prstGeom prst="rect">
+            <a:avLst/>
+          </a:prstGeom>
+          <a:noFill/>
+        </p:spPr>
+        <p:txBody>
+          <a:bodyPr wrap="none">
+            <a:spAutoFit/>
+          </a:bodyPr>
+          <a:lstStyle/>
+          <a:p>
+            <a:pPr algn="r">
+              <a:defRPr sz="950">
+                <a:solidFill>
+                  <a:srgbClr val="64748B"/>
+                </a:solidFill>
+              </a:defRPr>
+            </a:pPr>
+            <a:r>
+              <a:t>Dept. of CSE, VJCET</a:t>
             </a:r>
           </a:p>
         </p:txBody>
